--- a/playwright-tests/PRESENTATION.pptx
+++ b/playwright-tests/PRESENTATION.pptx
@@ -333,7 +333,7 @@
           <a:p>
             <a:fld id="{5BCAD085-E8A6-8845-BD4E-CB4CCA059FC4}" type="datetimeFigureOut">
               <a:rPr lang="en-US" smtClean="0"/>
-              <a:t>6/24/2026</a:t>
+              <a:t>6/25/2026</a:t>
             </a:fld>
             <a:endParaRPr lang="en-US"/>
           </a:p>
@@ -769,7 +769,7 @@
           <a:p>
             <a:fld id="{5BCAD085-E8A6-8845-BD4E-CB4CCA059FC4}" type="datetimeFigureOut">
               <a:rPr lang="en-US" smtClean="0"/>
-              <a:t>6/24/2026</a:t>
+              <a:t>6/25/2026</a:t>
             </a:fld>
             <a:endParaRPr lang="en-US"/>
           </a:p>
@@ -1019,7 +1019,7 @@
           <a:p>
             <a:fld id="{5BCAD085-E8A6-8845-BD4E-CB4CCA059FC4}" type="datetimeFigureOut">
               <a:rPr lang="en-US" smtClean="0"/>
-              <a:t>6/24/2026</a:t>
+              <a:t>6/25/2026</a:t>
             </a:fld>
             <a:endParaRPr lang="en-US"/>
           </a:p>
@@ -1327,7 +1327,7 @@
           <a:p>
             <a:fld id="{5BCAD085-E8A6-8845-BD4E-CB4CCA059FC4}" type="datetimeFigureOut">
               <a:rPr lang="en-US" smtClean="0"/>
-              <a:t>6/24/2026</a:t>
+              <a:t>6/25/2026</a:t>
             </a:fld>
             <a:endParaRPr lang="en-US"/>
           </a:p>
@@ -1645,7 +1645,7 @@
           <a:p>
             <a:fld id="{5BCAD085-E8A6-8845-BD4E-CB4CCA059FC4}" type="datetimeFigureOut">
               <a:rPr lang="en-US" smtClean="0"/>
-              <a:t>6/24/2026</a:t>
+              <a:t>6/25/2026</a:t>
             </a:fld>
             <a:endParaRPr lang="en-US"/>
           </a:p>
@@ -1947,7 +1947,7 @@
           <a:p>
             <a:fld id="{5BCAD085-E8A6-8845-BD4E-CB4CCA059FC4}" type="datetimeFigureOut">
               <a:rPr lang="en-US" smtClean="0"/>
-              <a:t>6/24/2026</a:t>
+              <a:t>6/25/2026</a:t>
             </a:fld>
             <a:endParaRPr lang="en-US"/>
           </a:p>
@@ -2314,7 +2314,7 @@
           <a:p>
             <a:fld id="{5BCAD085-E8A6-8845-BD4E-CB4CCA059FC4}" type="datetimeFigureOut">
               <a:rPr lang="en-US" smtClean="0"/>
-              <a:t>6/24/2026</a:t>
+              <a:t>6/25/2026</a:t>
             </a:fld>
             <a:endParaRPr lang="en-US"/>
           </a:p>
@@ -2488,7 +2488,7 @@
           <a:p>
             <a:fld id="{5BCAD085-E8A6-8845-BD4E-CB4CCA059FC4}" type="datetimeFigureOut">
               <a:rPr lang="en-US" smtClean="0"/>
-              <a:t>6/24/2026</a:t>
+              <a:t>6/25/2026</a:t>
             </a:fld>
             <a:endParaRPr lang="en-US"/>
           </a:p>
@@ -2668,7 +2668,7 @@
           <a:p>
             <a:fld id="{5BCAD085-E8A6-8845-BD4E-CB4CCA059FC4}" type="datetimeFigureOut">
               <a:rPr lang="en-US" smtClean="0"/>
-              <a:t>6/24/2026</a:t>
+              <a:t>6/25/2026</a:t>
             </a:fld>
             <a:endParaRPr lang="en-US"/>
           </a:p>
@@ -2838,7 +2838,7 @@
           <a:p>
             <a:fld id="{5BCAD085-E8A6-8845-BD4E-CB4CCA059FC4}" type="datetimeFigureOut">
               <a:rPr lang="en-US" smtClean="0"/>
-              <a:t>6/24/2026</a:t>
+              <a:t>6/25/2026</a:t>
             </a:fld>
             <a:endParaRPr lang="en-US"/>
           </a:p>
@@ -3088,7 +3088,7 @@
           <a:p>
             <a:fld id="{5BCAD085-E8A6-8845-BD4E-CB4CCA059FC4}" type="datetimeFigureOut">
               <a:rPr lang="en-US" smtClean="0"/>
-              <a:t>6/24/2026</a:t>
+              <a:t>6/25/2026</a:t>
             </a:fld>
             <a:endParaRPr lang="en-US"/>
           </a:p>
@@ -3324,7 +3324,7 @@
           <a:p>
             <a:fld id="{5BCAD085-E8A6-8845-BD4E-CB4CCA059FC4}" type="datetimeFigureOut">
               <a:rPr lang="en-US" smtClean="0"/>
-              <a:t>6/24/2026</a:t>
+              <a:t>6/25/2026</a:t>
             </a:fld>
             <a:endParaRPr lang="en-US"/>
           </a:p>
@@ -3706,7 +3706,7 @@
           <a:p>
             <a:fld id="{5BCAD085-E8A6-8845-BD4E-CB4CCA059FC4}" type="datetimeFigureOut">
               <a:rPr lang="en-US" smtClean="0"/>
-              <a:t>6/24/2026</a:t>
+              <a:t>6/25/2026</a:t>
             </a:fld>
             <a:endParaRPr lang="en-US"/>
           </a:p>
@@ -3824,7 +3824,7 @@
           <a:p>
             <a:fld id="{5BCAD085-E8A6-8845-BD4E-CB4CCA059FC4}" type="datetimeFigureOut">
               <a:rPr lang="en-US" smtClean="0"/>
-              <a:t>6/24/2026</a:t>
+              <a:t>6/25/2026</a:t>
             </a:fld>
             <a:endParaRPr lang="en-US"/>
           </a:p>
@@ -3919,7 +3919,7 @@
           <a:p>
             <a:fld id="{5BCAD085-E8A6-8845-BD4E-CB4CCA059FC4}" type="datetimeFigureOut">
               <a:rPr lang="en-US" smtClean="0"/>
-              <a:t>6/24/2026</a:t>
+              <a:t>6/25/2026</a:t>
             </a:fld>
             <a:endParaRPr lang="en-US"/>
           </a:p>
@@ -4174,7 +4174,7 @@
           <a:p>
             <a:fld id="{5BCAD085-E8A6-8845-BD4E-CB4CCA059FC4}" type="datetimeFigureOut">
               <a:rPr lang="en-US" smtClean="0"/>
-              <a:t>6/24/2026</a:t>
+              <a:t>6/25/2026</a:t>
             </a:fld>
             <a:endParaRPr lang="en-US"/>
           </a:p>
@@ -4457,7 +4457,7 @@
           <a:p>
             <a:fld id="{5BCAD085-E8A6-8845-BD4E-CB4CCA059FC4}" type="datetimeFigureOut">
               <a:rPr lang="en-US" smtClean="0"/>
-              <a:t>6/24/2026</a:t>
+              <a:t>6/25/2026</a:t>
             </a:fld>
             <a:endParaRPr lang="en-US"/>
           </a:p>
@@ -4863,7 +4863,7 @@
           <a:p>
             <a:fld id="{5BCAD085-E8A6-8845-BD4E-CB4CCA059FC4}" type="datetimeFigureOut">
               <a:rPr lang="en-US" smtClean="0"/>
-              <a:t>6/24/2026</a:t>
+              <a:t>6/25/2026</a:t>
             </a:fld>
             <a:endParaRPr lang="en-US"/>
           </a:p>
@@ -9627,7 +9627,24 @@
               </a:defRPr>
             </a:pPr>
             <a:r>
-              <a:t>Letzter kompletter Lauf: 23 Tests passed.</a:t>
+              <a:rPr dirty="0"/>
+              <a:t>Letzter </a:t>
+            </a:r>
+            <a:r>
+              <a:rPr dirty="0" err="1"/>
+              <a:t>kompletter</a:t>
+            </a:r>
+            <a:r>
+              <a:rPr dirty="0"/>
+              <a:t> Lauf: 2</a:t>
+            </a:r>
+            <a:r>
+              <a:rPr lang="de-DE" dirty="0"/>
+              <a:t>2</a:t>
+            </a:r>
+            <a:r>
+              <a:rPr dirty="0"/>
+              <a:t> Tests passed.</a:t>
             </a:r>
           </a:p>
           <a:p>
@@ -9643,7 +9660,48 @@
               </a:defRPr>
             </a:pPr>
             <a:r>
-              <a:t>Für frische Läufe kann das Docker-Volume gelöscht werden.</a:t>
+              <a:rPr dirty="0"/>
+              <a:t>Für </a:t>
+            </a:r>
+            <a:r>
+              <a:rPr dirty="0" err="1"/>
+              <a:t>frische</a:t>
+            </a:r>
+            <a:r>
+              <a:rPr dirty="0"/>
+              <a:t> </a:t>
+            </a:r>
+            <a:r>
+              <a:rPr dirty="0" err="1"/>
+              <a:t>Läufe</a:t>
+            </a:r>
+            <a:r>
+              <a:rPr dirty="0"/>
+              <a:t> </a:t>
+            </a:r>
+            <a:r>
+              <a:rPr dirty="0" err="1"/>
+              <a:t>kann</a:t>
+            </a:r>
+            <a:r>
+              <a:rPr dirty="0"/>
+              <a:t> das Docker-Volume </a:t>
+            </a:r>
+            <a:r>
+              <a:rPr dirty="0" err="1"/>
+              <a:t>gelöscht</a:t>
+            </a:r>
+            <a:r>
+              <a:rPr dirty="0"/>
+              <a:t> </a:t>
+            </a:r>
+            <a:r>
+              <a:rPr dirty="0" err="1"/>
+              <a:t>werden</a:t>
+            </a:r>
+            <a:r>
+              <a:rPr dirty="0"/>
+              <a:t>.</a:t>
             </a:r>
           </a:p>
           <a:p>
@@ -9659,7 +9717,56 @@
               </a:defRPr>
             </a:pPr>
             <a:r>
-              <a:t>Der HTML-Report hilft, wenn ein Test in CI oder lokal fehlschlägt.</a:t>
+              <a:rPr dirty="0"/>
+              <a:t>Der HTML-Report </a:t>
+            </a:r>
+            <a:r>
+              <a:rPr dirty="0" err="1"/>
+              <a:t>hilft</a:t>
+            </a:r>
+            <a:r>
+              <a:rPr dirty="0"/>
+              <a:t>, </a:t>
+            </a:r>
+            <a:r>
+              <a:rPr dirty="0" err="1"/>
+              <a:t>wenn</a:t>
+            </a:r>
+            <a:r>
+              <a:rPr dirty="0"/>
+              <a:t> </a:t>
+            </a:r>
+            <a:r>
+              <a:rPr dirty="0" err="1"/>
+              <a:t>ein</a:t>
+            </a:r>
+            <a:r>
+              <a:rPr dirty="0"/>
+              <a:t> Test in CI </a:t>
+            </a:r>
+            <a:r>
+              <a:rPr dirty="0" err="1"/>
+              <a:t>oder</a:t>
+            </a:r>
+            <a:r>
+              <a:rPr dirty="0"/>
+              <a:t> </a:t>
+            </a:r>
+            <a:r>
+              <a:rPr dirty="0" err="1"/>
+              <a:t>lokal</a:t>
+            </a:r>
+            <a:r>
+              <a:rPr dirty="0"/>
+              <a:t> </a:t>
+            </a:r>
+            <a:r>
+              <a:rPr dirty="0" err="1"/>
+              <a:t>fehlschlägt</a:t>
+            </a:r>
+            <a:r>
+              <a:rPr dirty="0"/>
+              <a:t>.</a:t>
             </a:r>
           </a:p>
         </p:txBody>
@@ -12059,7 +12166,7 @@
           <p:nvPr>
             <p:extLst>
               <p:ext uri="{D42A27DB-BD31-4B8C-83A1-F6EECF244321}">
-                <p14:modId xmlns:p14="http://schemas.microsoft.com/office/powerpoint/2010/main" val="87105808"/>
+                <p14:modId xmlns:p14="http://schemas.microsoft.com/office/powerpoint/2010/main" val="1245741330"/>
               </p:ext>
             </p:extLst>
           </p:nvPr>
@@ -12308,8 +12415,10 @@
                         </a:defRPr>
                       </a:pPr>
                       <a:r>
-                        <a:t>6</a:t>
+                        <a:rPr lang="de-DE" dirty="0"/>
+                        <a:t>5</a:t>
                       </a:r>
+                      <a:endParaRPr dirty="0"/>
                     </a:p>
                   </a:txBody>
                   <a:tcPr marL="45720" marR="45720" marT="36576" marB="36576">
@@ -12332,6 +12441,7 @@
                         </a:defRPr>
                       </a:pPr>
                       <a:r>
+                        <a:rPr dirty="0"/>
                         <a:t>3</a:t>
                       </a:r>
                     </a:p>
@@ -12405,8 +12515,13 @@
                       </a:pPr>
                       <a:r>
                         <a:rPr dirty="0"/>
-                        <a:t>12</a:t>
+                        <a:t>1</a:t>
                       </a:r>
+                      <a:r>
+                        <a:rPr lang="de-DE" dirty="0"/>
+                        <a:t>1</a:t>
+                      </a:r>
+                      <a:endParaRPr dirty="0"/>
                     </a:p>
                   </a:txBody>
                   <a:tcPr marL="45720" marR="45720" marT="36576" marB="36576">
@@ -12611,8 +12726,14 @@
                         </a:defRPr>
                       </a:pPr>
                       <a:r>
-                        <a:t>11</a:t>
+                        <a:rPr dirty="0"/>
+                        <a:t>1</a:t>
                       </a:r>
+                      <a:r>
+                        <a:rPr lang="de-DE" dirty="0"/>
+                        <a:t>0</a:t>
+                      </a:r>
+                      <a:endParaRPr dirty="0"/>
                     </a:p>
                   </a:txBody>
                   <a:tcPr marL="45720" marR="45720" marT="36576" marB="36576">
@@ -12708,8 +12829,13 @@
                       </a:pPr>
                       <a:r>
                         <a:rPr dirty="0"/>
-                        <a:t>23</a:t>
+                        <a:t>2</a:t>
                       </a:r>
+                      <a:r>
+                        <a:rPr lang="de-DE" dirty="0"/>
+                        <a:t>2</a:t>
+                      </a:r>
+                      <a:endParaRPr dirty="0"/>
                     </a:p>
                   </a:txBody>
                   <a:tcPr marL="45720" marR="45720" marT="36576" marB="36576">
@@ -13845,11 +13971,17 @@
           <p:cNvGraphicFramePr>
             <a:graphicFrameLocks noGrp="1"/>
           </p:cNvGraphicFramePr>
-          <p:nvPr/>
+          <p:nvPr>
+            <p:extLst>
+              <p:ext uri="{D42A27DB-BD31-4B8C-83A1-F6EECF244321}">
+                <p14:modId xmlns:p14="http://schemas.microsoft.com/office/powerpoint/2010/main" val="1018295577"/>
+              </p:ext>
+            </p:extLst>
+          </p:nvPr>
         </p:nvGraphicFramePr>
         <p:xfrm>
           <a:off x="685800" y="1143000"/>
-          <a:ext cx="10881360" cy="2834640"/>
+          <a:ext cx="10881360" cy="2429688"/>
         </p:xfrm>
         <a:graphic>
           <a:graphicData uri="http://schemas.openxmlformats.org/drawingml/2006/table">
@@ -13975,8 +14107,10 @@
                         </a:defRPr>
                       </a:pPr>
                       <a:r>
-                        <a:t>Titel trimmen</a:t>
+                        <a:rPr lang="de-DE" dirty="0"/>
+                        <a:t>Rezeptbesitzer</a:t>
                       </a:r>
+                      <a:endParaRPr dirty="0"/>
                     </a:p>
                   </a:txBody>
                   <a:tcPr marL="45720" marR="45720" marT="36576" marB="36576">
@@ -13999,8 +14133,10 @@
                         </a:defRPr>
                       </a:pPr>
                       <a:r>
-                        <a:t>User tippt Leerzeichen</a:t>
+                        <a:rPr lang="de-DE" dirty="0"/>
+                        <a:t>Besitzer darf bearbeiten</a:t>
                       </a:r>
+                      <a:endParaRPr dirty="0"/>
                     </a:p>
                   </a:txBody>
                   <a:tcPr marL="45720" marR="45720" marT="36576" marB="36576">
@@ -14023,8 +14159,18 @@
                         </a:defRPr>
                       </a:pPr>
                       <a:r>
-                        <a:t>„  Pasta  “ → „Pasta“</a:t>
+                        <a:rPr lang="de-DE" dirty="0" err="1"/>
+                        <a:t>canEditRecipe</a:t>
                       </a:r>
+                      <a:r>
+                        <a:rPr lang="de-DE" dirty="0"/>
+                        <a:t> = </a:t>
+                      </a:r>
+                      <a:r>
+                        <a:rPr lang="de-DE" dirty="0" err="1"/>
+                        <a:t>true</a:t>
+                      </a:r>
+                      <a:endParaRPr dirty="0"/>
                     </a:p>
                   </a:txBody>
                   <a:tcPr marL="45720" marR="45720" marT="36576" marB="36576">
@@ -14054,8 +14200,10 @@
                         </a:defRPr>
                       </a:pPr>
                       <a:r>
-                        <a:t>Mehrfachspaces</a:t>
+                        <a:rPr lang="de-DE" dirty="0"/>
+                        <a:t>Benutzer ohne ID</a:t>
                       </a:r>
+                      <a:endParaRPr dirty="0"/>
                     </a:p>
                   </a:txBody>
                   <a:tcPr marL="45720" marR="45720" marT="36576" marB="36576">
@@ -14078,8 +14226,10 @@
                         </a:defRPr>
                       </a:pPr>
                       <a:r>
-                        <a:t>Suche/Anzeige stabil</a:t>
+                        <a:rPr lang="de-DE" dirty="0"/>
+                        <a:t>Ungültiger User</a:t>
                       </a:r>
+                      <a:endParaRPr dirty="0"/>
                     </a:p>
                   </a:txBody>
                   <a:tcPr marL="45720" marR="45720" marT="36576" marB="36576">
@@ -14102,8 +14252,18 @@
                         </a:defRPr>
                       </a:pPr>
                       <a:r>
-                        <a:t>mehrere Spaces werden reduziert</a:t>
+                        <a:rPr lang="de-DE" dirty="0" err="1"/>
+                        <a:t>canEditRecipe</a:t>
                       </a:r>
+                      <a:r>
+                        <a:rPr lang="de-DE" dirty="0"/>
+                        <a:t> = </a:t>
+                      </a:r>
+                      <a:r>
+                        <a:rPr lang="de-DE" dirty="0" err="1"/>
+                        <a:t>false</a:t>
+                      </a:r>
+                      <a:endParaRPr lang="de-DE" dirty="0"/>
                     </a:p>
                   </a:txBody>
                   <a:tcPr marL="45720" marR="45720" marT="36576" marB="36576">
@@ -14133,8 +14293,10 @@
                         </a:defRPr>
                       </a:pPr>
                       <a:r>
-                        <a:t>Kurzer Titel</a:t>
+                        <a:rPr lang="de-DE" dirty="0"/>
+                        <a:t>Andere Gruppe</a:t>
                       </a:r>
+                      <a:endParaRPr dirty="0"/>
                     </a:p>
                   </a:txBody>
                   <a:tcPr marL="45720" marR="45720" marT="36576" marB="36576">
@@ -14157,8 +14319,10 @@
                         </a:defRPr>
                       </a:pPr>
                       <a:r>
-                        <a:t>kein sinnloser Rezeptname</a:t>
+                        <a:rPr lang="de-DE" dirty="0"/>
+                        <a:t>Gruppenrechte beachten</a:t>
                       </a:r>
+                      <a:endParaRPr dirty="0"/>
                     </a:p>
                   </a:txBody>
                   <a:tcPr marL="45720" marR="45720" marT="36576" marB="36576">
@@ -14181,8 +14345,18 @@
                         </a:defRPr>
                       </a:pPr>
                       <a:r>
-                        <a:t>&lt; 3 Zeichen ungültig</a:t>
+                        <a:rPr lang="de-DE" dirty="0" err="1"/>
+                        <a:t>canEditRecipe</a:t>
                       </a:r>
+                      <a:r>
+                        <a:rPr lang="de-DE" dirty="0"/>
+                        <a:t> = </a:t>
+                      </a:r>
+                      <a:r>
+                        <a:rPr lang="de-DE" dirty="0" err="1"/>
+                        <a:t>false</a:t>
+                      </a:r>
+                      <a:endParaRPr lang="de-DE" dirty="0"/>
                     </a:p>
                   </a:txBody>
                   <a:tcPr marL="45720" marR="45720" marT="36576" marB="36576">
@@ -14212,8 +14386,10 @@
                         </a:defRPr>
                       </a:pPr>
                       <a:r>
-                        <a:t>Slug mit Umlauten</a:t>
+                        <a:rPr lang="de-DE" dirty="0"/>
+                        <a:t>Gesperrtes Rezept</a:t>
                       </a:r>
+                      <a:endParaRPr dirty="0"/>
                     </a:p>
                   </a:txBody>
                   <a:tcPr marL="45720" marR="45720" marT="36576" marB="36576">
@@ -14236,8 +14412,14 @@
                         </a:defRPr>
                       </a:pPr>
                       <a:r>
-                        <a:t>deutsche Namen in URLs</a:t>
+                        <a:rPr lang="de-DE" dirty="0" err="1"/>
+                        <a:t>Locked</a:t>
                       </a:r>
+                      <a:r>
+                        <a:rPr lang="de-DE" dirty="0"/>
+                        <a:t>-Rezept schützen</a:t>
+                      </a:r>
+                      <a:endParaRPr dirty="0"/>
                     </a:p>
                   </a:txBody>
                   <a:tcPr marL="45720" marR="45720" marT="36576" marB="36576">
@@ -14260,8 +14442,18 @@
                         </a:defRPr>
                       </a:pPr>
                       <a:r>
-                        <a:t>Käse/Öl → kaese/oel</a:t>
+                        <a:rPr lang="de-DE" dirty="0" err="1"/>
+                        <a:t>canEditRecipe</a:t>
                       </a:r>
+                      <a:r>
+                        <a:rPr lang="de-DE" dirty="0"/>
+                        <a:t> = </a:t>
+                      </a:r>
+                      <a:r>
+                        <a:rPr lang="de-DE" dirty="0" err="1"/>
+                        <a:t>false</a:t>
+                      </a:r>
+                      <a:endParaRPr lang="de-DE" dirty="0"/>
                     </a:p>
                   </a:txBody>
                   <a:tcPr marL="45720" marR="45720" marT="36576" marB="36576">
@@ -14291,8 +14483,10 @@
                         </a:defRPr>
                       </a:pPr>
                       <a:r>
-                        <a:t>Zeit berechnen</a:t>
+                        <a:rPr lang="de-DE" dirty="0"/>
+                        <a:t>Anderer Haushalt mit Sperre</a:t>
                       </a:r>
+                      <a:endParaRPr dirty="0"/>
                     </a:p>
                   </a:txBody>
                   <a:tcPr marL="45720" marR="45720" marT="36576" marB="36576">
@@ -14315,8 +14509,10 @@
                         </a:defRPr>
                       </a:pPr>
                       <a:r>
-                        <a:t>Rezeptdauer wichtig</a:t>
+                        <a:rPr lang="de-DE" dirty="0"/>
+                        <a:t>Haushaltseinstellung beachten</a:t>
                       </a:r>
+                      <a:endParaRPr dirty="0"/>
                     </a:p>
                   </a:txBody>
                   <a:tcPr marL="45720" marR="45720" marT="36576" marB="36576">
@@ -14339,8 +14535,18 @@
                         </a:defRPr>
                       </a:pPr>
                       <a:r>
-                        <a:t>prep + cook = total</a:t>
+                        <a:rPr lang="de-DE" dirty="0" err="1"/>
+                        <a:t>canEditRecipe</a:t>
                       </a:r>
+                      <a:r>
+                        <a:rPr lang="de-DE" dirty="0"/>
+                        <a:t> = </a:t>
+                      </a:r>
+                      <a:r>
+                        <a:rPr lang="de-DE" dirty="0" err="1"/>
+                        <a:t>false</a:t>
+                      </a:r>
+                      <a:endParaRPr lang="de-DE" dirty="0"/>
                     </a:p>
                   </a:txBody>
                   <a:tcPr marL="45720" marR="45720" marT="36576" marB="36576">
@@ -14352,86 +14558,6 @@
                 <a:extLst>
                   <a:ext uri="{0D108BD9-81ED-4DB2-BD59-A6C34878D82A}">
                     <a16:rowId xmlns:a16="http://schemas.microsoft.com/office/drawing/2014/main" val="10005"/>
-                  </a:ext>
-                </a:extLst>
-              </a:tr>
-              <a:tr h="404952">
-                <a:tc>
-                  <a:txBody>
-                    <a:bodyPr/>
-                    <a:lstStyle/>
-                    <a:p>
-                      <a:pPr algn="l">
-                        <a:defRPr sz="1150" b="0">
-                          <a:solidFill>
-                            <a:srgbClr val="000000"/>
-                          </a:solidFill>
-                          <a:latin typeface="Aptos"/>
-                        </a:defRPr>
-                      </a:pPr>
-                      <a:r>
-                        <a:t>Portionen-Text</a:t>
-                      </a:r>
-                    </a:p>
-                  </a:txBody>
-                  <a:tcPr marL="45720" marR="45720" marT="36576" marB="36576">
-                    <a:solidFill>
-                      <a:srgbClr val="FFFFFF"/>
-                    </a:solidFill>
-                  </a:tcPr>
-                </a:tc>
-                <a:tc>
-                  <a:txBody>
-                    <a:bodyPr/>
-                    <a:lstStyle/>
-                    <a:p>
-                      <a:pPr algn="l">
-                        <a:defRPr sz="1150" b="0">
-                          <a:solidFill>
-                            <a:srgbClr val="000000"/>
-                          </a:solidFill>
-                          <a:latin typeface="Aptos"/>
-                        </a:defRPr>
-                      </a:pPr>
-                      <a:r>
-                        <a:t>Singular/Plural</a:t>
-                      </a:r>
-                    </a:p>
-                  </a:txBody>
-                  <a:tcPr marL="45720" marR="45720" marT="36576" marB="36576">
-                    <a:solidFill>
-                      <a:srgbClr val="FFFFFF"/>
-                    </a:solidFill>
-                  </a:tcPr>
-                </a:tc>
-                <a:tc>
-                  <a:txBody>
-                    <a:bodyPr/>
-                    <a:lstStyle/>
-                    <a:p>
-                      <a:pPr algn="l">
-                        <a:defRPr sz="1150" b="0">
-                          <a:solidFill>
-                            <a:srgbClr val="000000"/>
-                          </a:solidFill>
-                          <a:latin typeface="Aptos"/>
-                        </a:defRPr>
-                      </a:pPr>
-                      <a:r>
-                        <a:rPr dirty="0"/>
-                        <a:t>1 serving / 4 servings</a:t>
-                      </a:r>
-                    </a:p>
-                  </a:txBody>
-                  <a:tcPr marL="45720" marR="45720" marT="36576" marB="36576">
-                    <a:solidFill>
-                      <a:srgbClr val="FFFFFF"/>
-                    </a:solidFill>
-                  </a:tcPr>
-                </a:tc>
-                <a:extLst>
-                  <a:ext uri="{0D108BD9-81ED-4DB2-BD59-A6C34878D82A}">
-                    <a16:rowId xmlns:a16="http://schemas.microsoft.com/office/drawing/2014/main" val="10006"/>
                   </a:ext>
                 </a:extLst>
               </a:tr>
@@ -14480,6 +14606,35 @@
           <a:bodyPr wrap="none" lIns="109728" tIns="73152" rIns="109728" bIns="73152" rtlCol="0" anchor="ctr"/>
           <a:lstStyle/>
           <a:p>
+            <a:pPr>
+              <a:spcAft>
+                <a:spcPts val="0"/>
+              </a:spcAft>
+              <a:defRPr sz="1300">
+                <a:solidFill>
+                  <a:srgbClr val="000000"/>
+                </a:solidFill>
+                <a:latin typeface="Consolas"/>
+              </a:defRPr>
+            </a:pPr>
+            <a:r>
+              <a:rPr lang="de-DE" dirty="0" err="1"/>
+              <a:t>const</a:t>
+            </a:r>
+            <a:r>
+              <a:rPr lang="de-DE" dirty="0"/>
+              <a:t> { </a:t>
+            </a:r>
+            <a:r>
+              <a:rPr lang="de-DE" dirty="0" err="1"/>
+              <a:t>canEditRecipe</a:t>
+            </a:r>
+            <a:r>
+              <a:rPr lang="de-DE" dirty="0"/>
+              <a:t> } =</a:t>
+            </a:r>
+          </a:p>
+          <a:p>
             <a:pPr algn="ctr">
               <a:spcAft>
                 <a:spcPts val="0"/>
@@ -14492,44 +14647,36 @@
               </a:defRPr>
             </a:pPr>
             <a:r>
-              <a:rPr dirty="0"/>
-              <a:t>expect(</a:t>
-            </a:r>
-            <a:r>
-              <a:rPr dirty="0" err="1"/>
-              <a:t>createRecipeSlug</a:t>
-            </a:r>
-            <a:r>
-              <a:rPr dirty="0"/>
-              <a:t>('</a:t>
-            </a:r>
-            <a:r>
-              <a:rPr dirty="0" err="1"/>
-              <a:t>Käse</a:t>
-            </a:r>
-            <a:r>
-              <a:rPr dirty="0"/>
-              <a:t> Spätzle </a:t>
-            </a:r>
-            <a:r>
-              <a:rPr dirty="0" err="1"/>
-              <a:t>mit</a:t>
-            </a:r>
-            <a:r>
-              <a:rPr dirty="0"/>
-              <a:t> </a:t>
-            </a:r>
-            <a:r>
-              <a:rPr dirty="0" err="1"/>
-              <a:t>Öl</a:t>
-            </a:r>
-            <a:r>
-              <a:rPr dirty="0"/>
-              <a:t>'))</a:t>
-            </a:r>
-          </a:p>
-          <a:p>
-            <a:pPr>
+              <a:rPr lang="de-DE" dirty="0"/>
+              <a:t>  </a:t>
+            </a:r>
+            <a:r>
+              <a:rPr lang="de-DE" dirty="0" err="1"/>
+              <a:t>useRecipePermissions</a:t>
+            </a:r>
+            <a:r>
+              <a:rPr lang="de-DE" dirty="0"/>
+              <a:t>(recipe, </a:t>
+            </a:r>
+            <a:r>
+              <a:rPr lang="de-DE" dirty="0" err="1"/>
+              <a:t>recipeHousehold</a:t>
+            </a:r>
+            <a:r>
+              <a:rPr lang="de-DE" dirty="0"/>
+              <a:t>, </a:t>
+            </a:r>
+            <a:r>
+              <a:rPr lang="de-DE" dirty="0" err="1"/>
+              <a:t>user</a:t>
+            </a:r>
+            <a:r>
+              <a:rPr lang="de-DE" dirty="0"/>
+              <a:t>);</a:t>
+            </a:r>
+          </a:p>
+          <a:p>
+            <a:pPr algn="ctr">
               <a:spcAft>
                 <a:spcPts val="0"/>
               </a:spcAft>
@@ -14540,106 +14687,53 @@
                 <a:latin typeface="Consolas"/>
               </a:defRPr>
             </a:pPr>
-            <a:r>
-              <a:rPr dirty="0"/>
-              <a:t>  .</a:t>
-            </a:r>
-            <a:r>
-              <a:rPr dirty="0" err="1"/>
+            <a:endParaRPr lang="de-DE" dirty="0"/>
+          </a:p>
+          <a:p>
+            <a:pPr>
+              <a:spcAft>
+                <a:spcPts val="0"/>
+              </a:spcAft>
+              <a:defRPr sz="1300">
+                <a:solidFill>
+                  <a:srgbClr val="000000"/>
+                </a:solidFill>
+                <a:latin typeface="Consolas"/>
+              </a:defRPr>
+            </a:pPr>
+            <a:r>
+              <a:rPr lang="de-DE" dirty="0" err="1"/>
+              <a:t>expect</a:t>
+            </a:r>
+            <a:r>
+              <a:rPr lang="de-DE" dirty="0"/>
+              <a:t>(</a:t>
+            </a:r>
+            <a:r>
+              <a:rPr lang="de-DE" dirty="0" err="1"/>
+              <a:t>canEditRecipe.value</a:t>
+            </a:r>
+            <a:r>
+              <a:rPr lang="de-DE" dirty="0"/>
+              <a:t>).</a:t>
+            </a:r>
+            <a:r>
+              <a:rPr lang="de-DE" dirty="0" err="1"/>
               <a:t>toBe</a:t>
             </a:r>
             <a:r>
-              <a:rPr dirty="0"/>
-              <a:t>('</a:t>
-            </a:r>
-            <a:r>
-              <a:rPr dirty="0" err="1"/>
-              <a:t>kaese</a:t>
-            </a:r>
-            <a:r>
-              <a:rPr dirty="0"/>
-              <a:t>-spaetzle-</a:t>
-            </a:r>
-            <a:r>
-              <a:rPr dirty="0" err="1"/>
-              <a:t>mit</a:t>
-            </a:r>
-            <a:r>
-              <a:rPr dirty="0"/>
-              <a:t>-</a:t>
-            </a:r>
-            <a:r>
-              <a:rPr dirty="0" err="1"/>
-              <a:t>oel</a:t>
-            </a:r>
-            <a:r>
-              <a:rPr dirty="0"/>
-              <a:t>');</a:t>
-            </a:r>
-          </a:p>
-          <a:p>
-            <a:pPr>
-              <a:spcAft>
-                <a:spcPts val="0"/>
-              </a:spcAft>
-              <a:defRPr sz="1300">
-                <a:solidFill>
-                  <a:srgbClr val="000000"/>
-                </a:solidFill>
-                <a:latin typeface="Consolas"/>
-              </a:defRPr>
-            </a:pPr>
+              <a:rPr lang="de-DE" dirty="0"/>
+              <a:t>(</a:t>
+            </a:r>
+            <a:r>
+              <a:rPr lang="de-DE" dirty="0" err="1"/>
+              <a:t>false</a:t>
+            </a:r>
+            <a:r>
+              <a:rPr lang="de-DE" dirty="0"/>
+              <a:t>);</a:t>
+            </a:r>
             <a:endParaRPr dirty="0"/>
-          </a:p>
-          <a:p>
-            <a:pPr>
-              <a:spcAft>
-                <a:spcPts val="0"/>
-              </a:spcAft>
-              <a:defRPr sz="1300">
-                <a:solidFill>
-                  <a:srgbClr val="000000"/>
-                </a:solidFill>
-                <a:latin typeface="Consolas"/>
-              </a:defRPr>
-            </a:pPr>
-            <a:r>
-              <a:rPr dirty="0"/>
-              <a:t>expect(</a:t>
-            </a:r>
-            <a:r>
-              <a:rPr dirty="0" err="1"/>
-              <a:t>calculateTotalPreparationTime</a:t>
-            </a:r>
-            <a:r>
-              <a:rPr dirty="0"/>
-              <a:t>(15, 25))</a:t>
-            </a:r>
-          </a:p>
-          <a:p>
-            <a:pPr>
-              <a:spcAft>
-                <a:spcPts val="0"/>
-              </a:spcAft>
-              <a:defRPr sz="1300">
-                <a:solidFill>
-                  <a:srgbClr val="000000"/>
-                </a:solidFill>
-                <a:latin typeface="Consolas"/>
-              </a:defRPr>
-            </a:pPr>
-            <a:r>
-              <a:rPr dirty="0"/>
-              <a:t>  .</a:t>
-            </a:r>
-            <a:r>
-              <a:rPr dirty="0" err="1"/>
-              <a:t>toBe</a:t>
-            </a:r>
-            <a:r>
-              <a:rPr dirty="0"/>
-              <a:t>(40);</a:t>
-            </a:r>
           </a:p>
         </p:txBody>
       </p:sp>
@@ -14661,7 +14755,7 @@
         </p:spPr>
         <p:txBody>
           <a:bodyPr wrap="square">
-            <a:normAutofit/>
+            <a:normAutofit lnSpcReduction="10000"/>
           </a:bodyPr>
           <a:lstStyle/>
           <a:p>
@@ -14677,8 +14771,27 @@
               </a:defRPr>
             </a:pPr>
             <a:r>
-              <a:t>Hintergrund: kleine Rezeptregeln sollen schnell abgesichert werden, ohne Browser und ohne Datenbank.</a:t>
-            </a:r>
+              <a:rPr lang="de-DE" dirty="0"/>
+              <a:t>Hintergrund: Die Berechtigungslogik entscheidet, ob ein Benutzer ein Rezept bearbeiten darf.</a:t>
+            </a:r>
+          </a:p>
+          <a:p>
+            <a:pPr>
+              <a:spcAft>
+                <a:spcPts val="600"/>
+              </a:spcAft>
+              <a:defRPr sz="1700">
+                <a:solidFill>
+                  <a:srgbClr val="000000"/>
+                </a:solidFill>
+                <a:latin typeface="Aptos"/>
+              </a:defRPr>
+            </a:pPr>
+            <a:r>
+              <a:rPr lang="de-DE" dirty="0"/>
+              <a:t>Sie wird ohne Browser und ohne API isoliert getestet.</a:t>
+            </a:r>
+            <a:endParaRPr dirty="0"/>
           </a:p>
         </p:txBody>
       </p:sp>
